--- a/decks/geog-landscapes/geog-landscapes_ch6_flooding.pptx
+++ b/decks/geog-landscapes/geog-landscapes_ch6_flooding.pptx
@@ -125,30 +125,30 @@
   <p:extLst>
     <p:ext uri="{521415D9-36F7-43E2-AB2F-B90AF26B5E84}">
       <p14:sectionLst xmlns:p14="http://schemas.microsoft.com/office/powerpoint/2010/main">
-        <p14:section name="Opening" id="{d63b047e-9ec1-5ba1-761d-e6d5209140bc}">
+        <p14:section name="Opening" id="{0393fd56-a2a8-e2bc-c052-8ddf60431532}">
           <p14:sldIdLst>
             <p14:sldId id="256"/>
           </p14:sldIdLst>
         </p14:section>
-        <p14:section name="Gate" id="{000b915d-d589-06fe-9034-0e1343ac3158}">
+        <p14:section name="Gate" id="{2d823cee-84f9-52f9-88da-626d116afa57}">
           <p14:sldIdLst>
             <p14:sldId id="257"/>
             <p14:sldId id="258"/>
           </p14:sldIdLst>
         </p14:section>
-        <p14:section name="Pre-teach" id="{7b9b4089-81e4-952f-ba2d-0400a04eebc5}">
+        <p14:section name="Pre-teach" id="{bddc6134-c5fe-a050-b6e5-e48eac2d07f9}">
           <p14:sldIdLst>
             <p14:sldId id="259"/>
             <p14:sldId id="260"/>
           </p14:sldIdLst>
         </p14:section>
-        <p14:section name="Read-along" id="{98ac9c6c-6965-ce5f-511e-953a856834ba}">
+        <p14:section name="Read-along" id="{5207f2fa-e8ab-6aea-6166-c77b50681706}">
           <p14:sldIdLst>
             <p14:sldId id="261"/>
             <p14:sldId id="262"/>
           </p14:sldIdLst>
         </p14:section>
-        <p14:section name="Teach" id="{1484c7f0-8e2f-f218-5238-84f89ff927dd}">
+        <p14:section name="Teach" id="{a06b9edd-7764-7f4c-67eb-65cbe043982f}">
           <p14:sldIdLst>
             <p14:sldId id="263"/>
             <p14:sldId id="264"/>
@@ -157,19 +157,19 @@
             <p14:sldId id="267"/>
           </p14:sldIdLst>
         </p14:section>
-        <p14:section name="Routes" id="{67da3179-9483-a037-8986-14921eb40297}">
+        <p14:section name="Routes" id="{bdc31f17-fec7-1243-63b8-6d911c907ee0}">
           <p14:sldIdLst>
             <p14:sldId id="268"/>
             <p14:sldId id="269"/>
             <p14:sldId id="270"/>
           </p14:sldIdLst>
         </p14:section>
-        <p14:section name="Close" id="{8ba51e9a-4d39-d3b5-f8fa-bc0d944e8367}">
+        <p14:section name="Close" id="{de9e110b-bcd7-d18b-befa-493821bac096}">
           <p14:sldIdLst>
             <p14:sldId id="271"/>
           </p14:sldIdLst>
         </p14:section>
-        <p14:section name="Answers" id="{35d062af-077e-d414-db61-456c236a656c}">
+        <p14:section name="Answers" id="{afdd9612-762d-52d4-cfde-2aacf4d3c812}">
           <p14:sldIdLst>
             <p14:sldId id="272"/>
             <p14:sldId id="273"/>
@@ -1597,7 +1597,7 @@
               <a:rPr lang="en-US" dirty="0"/>
               <a:t>Do now — retrieval. Silent, no notes, no help: recall comes before any support. Give about four minutes.
 1. On a hydrograph, peak rainfall was at 06:00 and peak discharge was at 15:00. What was the lag time, in hours?  →  9 hours
-2. Which of these is a human cause of flooding?  →  A   Urbanisation
+2. Which of these is a human cause of flooding?  →  D   Urbanisation
 3. A flashy hydrograph has a ___ lag time and a high peak discharge.  →  short
 Circulate: who gets 3/3 (Stretch route), 2/3 (Core), 0–1 (Support)? Use this to route pupils later in the lesson.</a:t>
             </a:r>
@@ -1689,7 +1689,7 @@
               <a:rPr lang="en-US" dirty="0"/>
               <a:t>Answers — pupils mark their own in a different colour, then hands up for 3/3, 2/3, 1/3.
 1. 9 hours. Lag time is the time between peak rainfall and peak discharge: 15:00 − 06:00 = 9 hours.
-2. A   Urbanisation. Urbanisation is people covering the land in impermeable surfaces and drains, so rain reaches the river fast. The other three are physical.
+2. D   Urbanisation. Urbanisation is people covering the land in impermeable surfaces and drains, so rain reaches the river fast. The other three are physical.
 3. short. Flashy means the river responds quickly: the peak discharge comes soon after the peak rainfall.
 Say the route each score points to: 3/3 Stretch, 2/3 Core, 0–1 Support. Pupils may choose to move up.</a:t>
             </a:r>
@@ -11920,7 +11920,7 @@
                 <a:ea typeface="Calibri" pitchFamily="34" charset="-122"/>
                 <a:cs typeface="Calibri" pitchFamily="34" charset="-120"/>
               </a:rPr>
-              <a:t>Urbanisation</a:t>
+              <a:t>Relief of the drainage basin</a:t>
             </a:r>
             <a:endParaRPr lang="en-US" sz="2400" dirty="0"/>
           </a:p>
@@ -11994,7 +11994,7 @@
                 <a:ea typeface="Calibri" pitchFamily="34" charset="-122"/>
                 <a:cs typeface="Calibri" pitchFamily="34" charset="-120"/>
               </a:rPr>
-              <a:t>Relief of the drainage basin</a:t>
+              <a:t>Rock type</a:t>
             </a:r>
             <a:endParaRPr lang="en-US" sz="2400" dirty="0"/>
           </a:p>
@@ -12031,7 +12031,7 @@
                 <a:ea typeface="Calibri" pitchFamily="34" charset="-122"/>
                 <a:cs typeface="Calibri" pitchFamily="34" charset="-120"/>
               </a:rPr>
-              <a:t>Rock type</a:t>
+              <a:t>Urbanisation</a:t>
             </a:r>
             <a:endParaRPr lang="en-US" sz="2400" dirty="0"/>
           </a:p>
@@ -12880,7 +12880,7 @@
                 <a:ea typeface="Calibri" pitchFamily="34" charset="-122"/>
                 <a:cs typeface="Calibri" pitchFamily="34" charset="-120"/>
               </a:rPr>
-              <a:t>A   Urbanisation</a:t>
+              <a:t>D   Urbanisation</a:t>
             </a:r>
             <a:endParaRPr lang="en-US" sz="2200" dirty="0"/>
           </a:p>

--- a/decks/geog-landscapes/geog-landscapes_ch6_flooding.pptx
+++ b/decks/geog-landscapes/geog-landscapes_ch6_flooding.pptx
@@ -125,30 +125,30 @@
   <p:extLst>
     <p:ext uri="{521415D9-36F7-43E2-AB2F-B90AF26B5E84}">
       <p14:sectionLst xmlns:p14="http://schemas.microsoft.com/office/powerpoint/2010/main">
-        <p14:section name="Opening" id="{0393fd56-a2a8-e2bc-c052-8ddf60431532}">
+        <p14:section name="Opening" id="{709d183a-b36e-b2e4-5634-793faad1ee07}">
           <p14:sldIdLst>
             <p14:sldId id="256"/>
           </p14:sldIdLst>
         </p14:section>
-        <p14:section name="Gate" id="{2d823cee-84f9-52f9-88da-626d116afa57}">
+        <p14:section name="Gate" id="{f9bdb64f-05fa-79d9-4c6a-de683d174e61}">
           <p14:sldIdLst>
             <p14:sldId id="257"/>
             <p14:sldId id="258"/>
           </p14:sldIdLst>
         </p14:section>
-        <p14:section name="Pre-teach" id="{bddc6134-c5fe-a050-b6e5-e48eac2d07f9}">
+        <p14:section name="Pre-teach" id="{35a25ad2-b632-5736-c860-a0f3dc6b7d16}">
           <p14:sldIdLst>
             <p14:sldId id="259"/>
             <p14:sldId id="260"/>
           </p14:sldIdLst>
         </p14:section>
-        <p14:section name="Read-along" id="{5207f2fa-e8ab-6aea-6166-c77b50681706}">
+        <p14:section name="Read-along" id="{99d8449b-739b-2dd3-a683-37d2d332a7bb}">
           <p14:sldIdLst>
             <p14:sldId id="261"/>
             <p14:sldId id="262"/>
           </p14:sldIdLst>
         </p14:section>
-        <p14:section name="Teach" id="{a06b9edd-7764-7f4c-67eb-65cbe043982f}">
+        <p14:section name="Teach" id="{2d219341-825c-65d0-67b9-b9402c9f4a98}">
           <p14:sldIdLst>
             <p14:sldId id="263"/>
             <p14:sldId id="264"/>
@@ -157,19 +157,19 @@
             <p14:sldId id="267"/>
           </p14:sldIdLst>
         </p14:section>
-        <p14:section name="Routes" id="{bdc31f17-fec7-1243-63b8-6d911c907ee0}">
+        <p14:section name="Routes" id="{9447a1b8-5112-2400-bd03-0aee8a4ba755}">
           <p14:sldIdLst>
             <p14:sldId id="268"/>
             <p14:sldId id="269"/>
             <p14:sldId id="270"/>
           </p14:sldIdLst>
         </p14:section>
-        <p14:section name="Close" id="{de9e110b-bcd7-d18b-befa-493821bac096}">
+        <p14:section name="Close" id="{2579c6a0-52c4-fa66-b789-239bb58742e7}">
           <p14:sldIdLst>
             <p14:sldId id="271"/>
           </p14:sldIdLst>
         </p14:section>
-        <p14:section name="Answers" id="{afdd9612-762d-52d4-cfde-2aacf4d3c812}">
+        <p14:section name="Answers" id="{8910af83-5579-4495-2007-d732225acdb1}">
           <p14:sldIdLst>
             <p14:sldId id="272"/>
             <p14:sldId id="273"/>
